--- a/public/presentation/aritzia-task-management.pptx
+++ b/public/presentation/aritzia-task-management.pptx
@@ -14730,7 +14730,7 @@
                 <a:ea typeface="Arial" pitchFamily="34" charset="-122"/>
                 <a:cs typeface="Arial" pitchFamily="34" charset="-120"/>
               </a:rPr>
-              <a:t>Reads TASKS_API_KEY from server env</a:t>
+              <a:t>Reads the private key from server env only</a:t>
             </a:r>
             <a:endParaRPr lang="en-US" sz="1200" dirty="0"/>
           </a:p>
